--- a/RAG_Advanced_Folien.pptx
+++ b/RAG_Advanced_Folien.pptx
@@ -149,6 +149,27 @@
 </p:presentation>
 </file>
 
+<file path=ppt/changesInfos/changesInfo1.xml><?xml version="1.0" encoding="utf-8"?>
+<pc:chgInfo xmlns:a="http://schemas.openxmlformats.org/drawingml/2006/main" xmlns:r="http://schemas.openxmlformats.org/officeDocument/2006/relationships" xmlns:ac="http://schemas.microsoft.com/office/drawing/2013/main/command" xmlns:pc="http://schemas.microsoft.com/office/powerpoint/2013/main/command">
+  <pc:docChgLst>
+    <pc:chgData name="Jannik Braunshausen" userId="c086b0d439a98319" providerId="LiveId" clId="{6AC827A1-BD27-4DC9-88A4-E104B38D0537}"/>
+    <pc:docChg chg="undo custSel modSld">
+      <pc:chgData name="Jannik Braunshausen" userId="c086b0d439a98319" providerId="LiveId" clId="{6AC827A1-BD27-4DC9-88A4-E104B38D0537}" dt="2026-07-23T11:48:25.168" v="1" actId="20577"/>
+      <pc:docMkLst>
+        <pc:docMk/>
+      </pc:docMkLst>
+      <pc:sldChg chg="modNotesTx">
+        <pc:chgData name="Jannik Braunshausen" userId="c086b0d439a98319" providerId="LiveId" clId="{6AC827A1-BD27-4DC9-88A4-E104B38D0537}" dt="2026-07-23T11:48:25.168" v="1" actId="20577"/>
+        <pc:sldMkLst>
+          <pc:docMk/>
+          <pc:sldMk cId="0" sldId="282"/>
+        </pc:sldMkLst>
+      </pc:sldChg>
+    </pc:docChg>
+  </pc:docChgLst>
+</pc:chgInfo>
+</file>
+
 <file path=ppt/notesMasters/notesMaster1.xml><?xml version="1.0" encoding="utf-8"?>
 <p:notesMaster xmlns:a="http://schemas.openxmlformats.org/drawingml/2006/main" xmlns:r="http://schemas.openxmlformats.org/officeDocument/2006/relationships" xmlns:p="http://schemas.openxmlformats.org/presentationml/2006/main">
   <p:cSld>
@@ -1973,7 +1994,39 @@
           <a:p>
             <a:r>
               <a:rPr lang="en-US" dirty="0"/>
-              <a:t>WICHTIG: echte Zahlen aus benchmark_ergebnis.png hier einsetzen. Auf Frage 13 zeigen: 'Hybrid + Rerank' scheitert an der Falle, erst 'Advanced' löst sie.</a:t>
+              <a:t>WICHTIG: </a:t>
+            </a:r>
+            <a:r>
+              <a:rPr lang="en-US" dirty="0" err="1"/>
+              <a:t>echte</a:t>
+            </a:r>
+            <a:r>
+              <a:rPr lang="en-US" dirty="0"/>
+              <a:t> Zahlen </a:t>
+            </a:r>
+            <a:r>
+              <a:rPr lang="en-US" dirty="0" err="1"/>
+              <a:t>aus</a:t>
+            </a:r>
+            <a:r>
+              <a:rPr lang="en-US" dirty="0"/>
+              <a:t> benchmark_ergebnis.png </a:t>
+            </a:r>
+            <a:r>
+              <a:rPr lang="en-US" dirty="0" err="1"/>
+              <a:t>hier</a:t>
+            </a:r>
+            <a:r>
+              <a:rPr lang="en-US" dirty="0"/>
+              <a:t> </a:t>
+            </a:r>
+            <a:r>
+              <a:rPr lang="en-US" dirty="0" err="1"/>
+              <a:t>einsetzen</a:t>
+            </a:r>
+            <a:r>
+              <a:rPr lang="en-US" dirty="0"/>
+              <a:t>. Auf Frage 13 zeigen: 'Hybrid + Rerank' scheitert an der Falle, erst 'Advanced' löst sie.</a:t>
             </a:r>
           </a:p>
         </p:txBody>
